--- a/ゲーム科1年/00_前期/ゲームプログラミングⅢ/04_オリジナルゲーム制作.pptx
+++ b/ゲーム科1年/00_前期/ゲームプログラミングⅢ/04_オリジナルゲーム制作.pptx
@@ -6,6 +6,10 @@
   </p:sldMasterIdLst>
   <p:sldIdLst>
     <p:sldId id="256" r:id="rId2"/>
+    <p:sldId id="257" r:id="rId3"/>
+    <p:sldId id="258" r:id="rId4"/>
+    <p:sldId id="259" r:id="rId5"/>
+    <p:sldId id="260" r:id="rId6"/>
   </p:sldIdLst>
   <p:sldSz cx="12192000" cy="6858000"/>
   <p:notesSz cx="6858000" cy="9144000"/>
@@ -259,7 +263,7 @@
           <a:p>
             <a:fld id="{E9CC885B-4903-4D54-9A93-00025F12DED9}" type="datetimeFigureOut">
               <a:rPr kumimoji="1" lang="ja-JP" altLang="en-US" smtClean="0"/>
-              <a:t>2024/10/25</a:t>
+              <a:t>2026/1/28</a:t>
             </a:fld>
             <a:endParaRPr kumimoji="1" lang="ja-JP" altLang="en-US"/>
           </a:p>
@@ -489,7 +493,7 @@
           <a:p>
             <a:fld id="{E9CC885B-4903-4D54-9A93-00025F12DED9}" type="datetimeFigureOut">
               <a:rPr kumimoji="1" lang="ja-JP" altLang="en-US" smtClean="0"/>
-              <a:t>2024/10/25</a:t>
+              <a:t>2026/1/28</a:t>
             </a:fld>
             <a:endParaRPr kumimoji="1" lang="ja-JP" altLang="en-US"/>
           </a:p>
@@ -729,7 +733,7 @@
           <a:p>
             <a:fld id="{E9CC885B-4903-4D54-9A93-00025F12DED9}" type="datetimeFigureOut">
               <a:rPr kumimoji="1" lang="ja-JP" altLang="en-US" smtClean="0"/>
-              <a:t>2024/10/25</a:t>
+              <a:t>2026/1/28</a:t>
             </a:fld>
             <a:endParaRPr kumimoji="1" lang="ja-JP" altLang="en-US"/>
           </a:p>
@@ -959,7 +963,7 @@
           <a:p>
             <a:fld id="{E9CC885B-4903-4D54-9A93-00025F12DED9}" type="datetimeFigureOut">
               <a:rPr kumimoji="1" lang="ja-JP" altLang="en-US" smtClean="0"/>
-              <a:t>2024/10/25</a:t>
+              <a:t>2026/1/28</a:t>
             </a:fld>
             <a:endParaRPr kumimoji="1" lang="ja-JP" altLang="en-US"/>
           </a:p>
@@ -1234,7 +1238,7 @@
           <a:p>
             <a:fld id="{E9CC885B-4903-4D54-9A93-00025F12DED9}" type="datetimeFigureOut">
               <a:rPr kumimoji="1" lang="ja-JP" altLang="en-US" smtClean="0"/>
-              <a:t>2024/10/25</a:t>
+              <a:t>2026/1/28</a:t>
             </a:fld>
             <a:endParaRPr kumimoji="1" lang="ja-JP" altLang="en-US"/>
           </a:p>
@@ -1563,7 +1567,7 @@
           <a:p>
             <a:fld id="{E9CC885B-4903-4D54-9A93-00025F12DED9}" type="datetimeFigureOut">
               <a:rPr kumimoji="1" lang="ja-JP" altLang="en-US" smtClean="0"/>
-              <a:t>2024/10/25</a:t>
+              <a:t>2026/1/28</a:t>
             </a:fld>
             <a:endParaRPr kumimoji="1" lang="ja-JP" altLang="en-US"/>
           </a:p>
@@ -2039,7 +2043,7 @@
           <a:p>
             <a:fld id="{E9CC885B-4903-4D54-9A93-00025F12DED9}" type="datetimeFigureOut">
               <a:rPr kumimoji="1" lang="ja-JP" altLang="en-US" smtClean="0"/>
-              <a:t>2024/10/25</a:t>
+              <a:t>2026/1/28</a:t>
             </a:fld>
             <a:endParaRPr kumimoji="1" lang="ja-JP" altLang="en-US"/>
           </a:p>
@@ -2180,7 +2184,7 @@
           <a:p>
             <a:fld id="{E9CC885B-4903-4D54-9A93-00025F12DED9}" type="datetimeFigureOut">
               <a:rPr kumimoji="1" lang="ja-JP" altLang="en-US" smtClean="0"/>
-              <a:t>2024/10/25</a:t>
+              <a:t>2026/1/28</a:t>
             </a:fld>
             <a:endParaRPr kumimoji="1" lang="ja-JP" altLang="en-US"/>
           </a:p>
@@ -2293,7 +2297,7 @@
           <a:p>
             <a:fld id="{E9CC885B-4903-4D54-9A93-00025F12DED9}" type="datetimeFigureOut">
               <a:rPr kumimoji="1" lang="ja-JP" altLang="en-US" smtClean="0"/>
-              <a:t>2024/10/25</a:t>
+              <a:t>2026/1/28</a:t>
             </a:fld>
             <a:endParaRPr kumimoji="1" lang="ja-JP" altLang="en-US"/>
           </a:p>
@@ -2636,7 +2640,7 @@
           <a:p>
             <a:fld id="{E9CC885B-4903-4D54-9A93-00025F12DED9}" type="datetimeFigureOut">
               <a:rPr kumimoji="1" lang="ja-JP" altLang="en-US" smtClean="0"/>
-              <a:t>2024/10/25</a:t>
+              <a:t>2026/1/28</a:t>
             </a:fld>
             <a:endParaRPr kumimoji="1" lang="ja-JP" altLang="en-US"/>
           </a:p>
@@ -2924,7 +2928,7 @@
           <a:p>
             <a:fld id="{E9CC885B-4903-4D54-9A93-00025F12DED9}" type="datetimeFigureOut">
               <a:rPr kumimoji="1" lang="ja-JP" altLang="en-US" smtClean="0"/>
-              <a:t>2024/10/25</a:t>
+              <a:t>2026/1/28</a:t>
             </a:fld>
             <a:endParaRPr kumimoji="1" lang="ja-JP" altLang="en-US"/>
           </a:p>
@@ -3197,7 +3201,7 @@
           <a:p>
             <a:fld id="{E9CC885B-4903-4D54-9A93-00025F12DED9}" type="datetimeFigureOut">
               <a:rPr kumimoji="1" lang="ja-JP" altLang="en-US" smtClean="0"/>
-              <a:t>2024/10/25</a:t>
+              <a:t>2026/1/28</a:t>
             </a:fld>
             <a:endParaRPr kumimoji="1" lang="ja-JP" altLang="en-US"/>
           </a:p>
@@ -3768,6 +3772,1268 @@
 </p:sld>
 </file>
 
+<file path=ppt/slides/slide2.xml><?xml version="1.0" encoding="utf-8"?>
+<p:sld xmlns:a="http://schemas.openxmlformats.org/drawingml/2006/main" xmlns:r="http://schemas.openxmlformats.org/officeDocument/2006/relationships" xmlns:p="http://schemas.openxmlformats.org/presentationml/2006/main">
+  <p:cSld>
+    <p:spTree>
+      <p:nvGrpSpPr>
+        <p:cNvPr id="1" name=""/>
+        <p:cNvGrpSpPr/>
+        <p:nvPr/>
+      </p:nvGrpSpPr>
+      <p:grpSpPr>
+        <a:xfrm>
+          <a:off x="0" y="0"/>
+          <a:ext cx="0" cy="0"/>
+          <a:chOff x="0" y="0"/>
+          <a:chExt cx="0" cy="0"/>
+        </a:xfrm>
+      </p:grpSpPr>
+      <p:sp>
+        <p:nvSpPr>
+          <p:cNvPr id="4" name="テキスト ボックス 3">
+            <a:extLst>
+              <a:ext uri="{FF2B5EF4-FFF2-40B4-BE49-F238E27FC236}">
+                <a16:creationId xmlns:a16="http://schemas.microsoft.com/office/drawing/2014/main" id="{5A13BF46-B8C5-48AA-8308-C9ECFF431A18}"/>
+              </a:ext>
+            </a:extLst>
+          </p:cNvPr>
+          <p:cNvSpPr txBox="1"/>
+          <p:nvPr/>
+        </p:nvSpPr>
+        <p:spPr>
+          <a:xfrm>
+            <a:off x="567542" y="491954"/>
+            <a:ext cx="6457217" cy="584775"/>
+          </a:xfrm>
+          <a:prstGeom prst="rect">
+            <a:avLst/>
+          </a:prstGeom>
+          <a:noFill/>
+        </p:spPr>
+        <p:txBody>
+          <a:bodyPr wrap="none" rtlCol="0">
+            <a:spAutoFit/>
+          </a:bodyPr>
+          <a:lstStyle/>
+          <a:p>
+            <a:r>
+              <a:rPr kumimoji="1" lang="ja-JP" altLang="en-US" sz="3200" b="1" u="sng" dirty="0"/>
+              <a:t>オリジナルゲーム制作 企画と仕様</a:t>
+            </a:r>
+          </a:p>
+        </p:txBody>
+      </p:sp>
+      <p:sp>
+        <p:nvSpPr>
+          <p:cNvPr id="6" name="テキスト ボックス 5">
+            <a:extLst>
+              <a:ext uri="{FF2B5EF4-FFF2-40B4-BE49-F238E27FC236}">
+                <a16:creationId xmlns:a16="http://schemas.microsoft.com/office/drawing/2014/main" id="{55830AD6-028B-4C4E-80BF-B70DFC1C3A46}"/>
+              </a:ext>
+            </a:extLst>
+          </p:cNvPr>
+          <p:cNvSpPr txBox="1"/>
+          <p:nvPr/>
+        </p:nvSpPr>
+        <p:spPr>
+          <a:xfrm>
+            <a:off x="567542" y="1216429"/>
+            <a:ext cx="8802410" cy="4524315"/>
+          </a:xfrm>
+          <a:prstGeom prst="rect">
+            <a:avLst/>
+          </a:prstGeom>
+          <a:noFill/>
+        </p:spPr>
+        <p:txBody>
+          <a:bodyPr wrap="none" rtlCol="0">
+            <a:spAutoFit/>
+          </a:bodyPr>
+          <a:lstStyle/>
+          <a:p>
+            <a:r>
+              <a:rPr kumimoji="1" lang="ja-JP" altLang="en-US" sz="2400" dirty="0"/>
+              <a:t>長期期間でのゲーム制作で重要なのは、</a:t>
+            </a:r>
+            <a:endParaRPr kumimoji="1" lang="en-US" altLang="ja-JP" sz="2400" dirty="0"/>
+          </a:p>
+          <a:p>
+            <a:r>
+              <a:rPr lang="ja-JP" altLang="en-US" sz="2400" b="1" dirty="0">
+                <a:solidFill>
+                  <a:srgbClr val="FF0000"/>
+                </a:solidFill>
+              </a:rPr>
+              <a:t>企画</a:t>
+            </a:r>
+            <a:r>
+              <a:rPr lang="ja-JP" altLang="en-US" sz="2400" dirty="0"/>
+              <a:t>と</a:t>
+            </a:r>
+            <a:r>
+              <a:rPr lang="ja-JP" altLang="en-US" sz="2400" b="1" dirty="0">
+                <a:solidFill>
+                  <a:srgbClr val="FF0000"/>
+                </a:solidFill>
+              </a:rPr>
+              <a:t>仕様</a:t>
+            </a:r>
+            <a:r>
+              <a:rPr lang="ja-JP" altLang="en-US" sz="2400" dirty="0"/>
+              <a:t>をあらかじめ明確にしておくことです。</a:t>
+            </a:r>
+            <a:endParaRPr kumimoji="1" lang="en-US" altLang="ja-JP" sz="2400" dirty="0"/>
+          </a:p>
+          <a:p>
+            <a:endParaRPr kumimoji="1" lang="en-US" altLang="ja-JP" sz="2400" dirty="0"/>
+          </a:p>
+          <a:p>
+            <a:r>
+              <a:rPr lang="ja-JP" altLang="en-US" sz="2400" b="1" dirty="0">
+                <a:solidFill>
+                  <a:srgbClr val="FF0000"/>
+                </a:solidFill>
+              </a:rPr>
+              <a:t>■企画</a:t>
+            </a:r>
+            <a:endParaRPr lang="en-US" altLang="ja-JP" sz="2400" b="1" dirty="0">
+              <a:solidFill>
+                <a:srgbClr val="FF0000"/>
+              </a:solidFill>
+            </a:endParaRPr>
+          </a:p>
+          <a:p>
+            <a:r>
+              <a:rPr kumimoji="1" lang="ja-JP" altLang="en-US" sz="2400" dirty="0"/>
+              <a:t>どんなゲームにするのか。</a:t>
+            </a:r>
+            <a:endParaRPr kumimoji="1" lang="en-US" altLang="ja-JP" sz="2400" dirty="0"/>
+          </a:p>
+          <a:p>
+            <a:r>
+              <a:rPr lang="ja-JP" altLang="en-US" sz="2400" dirty="0"/>
+              <a:t>ゲームの詳細ではなく、</a:t>
+            </a:r>
+            <a:r>
+              <a:rPr lang="ja-JP" altLang="en-US" sz="2400" b="1" dirty="0">
+                <a:solidFill>
+                  <a:srgbClr val="FF0000"/>
+                </a:solidFill>
+              </a:rPr>
+              <a:t>何が面白いのか</a:t>
+            </a:r>
+            <a:r>
+              <a:rPr lang="ja-JP" altLang="en-US" sz="2400" dirty="0"/>
+              <a:t>を主に</a:t>
+            </a:r>
+            <a:r>
+              <a:rPr lang="ja-JP" altLang="en-US" sz="2400" b="1" dirty="0">
+                <a:solidFill>
+                  <a:srgbClr val="FF0000"/>
+                </a:solidFill>
+              </a:rPr>
+              <a:t>企画書</a:t>
+            </a:r>
+            <a:r>
+              <a:rPr lang="ja-JP" altLang="en-US" sz="2400" dirty="0"/>
+              <a:t>に書く。</a:t>
+            </a:r>
+            <a:endParaRPr lang="en-US" altLang="ja-JP" sz="2400" dirty="0"/>
+          </a:p>
+          <a:p>
+            <a:endParaRPr kumimoji="1" lang="en-US" altLang="ja-JP" sz="2400" dirty="0"/>
+          </a:p>
+          <a:p>
+            <a:r>
+              <a:rPr lang="ja-JP" altLang="en-US" sz="2400" b="1" dirty="0">
+                <a:solidFill>
+                  <a:srgbClr val="FF0000"/>
+                </a:solidFill>
+              </a:rPr>
+              <a:t>■仕様</a:t>
+            </a:r>
+            <a:endParaRPr lang="en-US" altLang="ja-JP" sz="2400" b="1" dirty="0">
+              <a:solidFill>
+                <a:srgbClr val="FF0000"/>
+              </a:solidFill>
+            </a:endParaRPr>
+          </a:p>
+          <a:p>
+            <a:r>
+              <a:rPr kumimoji="1" lang="ja-JP" altLang="en-US" sz="2400" b="1" dirty="0">
+                <a:solidFill>
+                  <a:srgbClr val="FF0000"/>
+                </a:solidFill>
+              </a:rPr>
+              <a:t>ゲームに必要なもの全て。</a:t>
+            </a:r>
+            <a:r>
+              <a:rPr kumimoji="1" lang="ja-JP" altLang="en-US" sz="2400" dirty="0"/>
+              <a:t>それらを</a:t>
+            </a:r>
+            <a:r>
+              <a:rPr kumimoji="1" lang="ja-JP" altLang="en-US" sz="2400" b="1" dirty="0">
+                <a:solidFill>
+                  <a:srgbClr val="FF0000"/>
+                </a:solidFill>
+              </a:rPr>
+              <a:t>明確に仕様書</a:t>
+            </a:r>
+            <a:r>
+              <a:rPr kumimoji="1" lang="ja-JP" altLang="en-US" sz="2400" dirty="0"/>
+              <a:t>に書く。</a:t>
+            </a:r>
+            <a:endParaRPr kumimoji="1" lang="en-US" altLang="ja-JP" sz="2400" dirty="0"/>
+          </a:p>
+          <a:p>
+            <a:r>
+              <a:rPr lang="ja-JP" altLang="en-US" sz="2400" dirty="0"/>
+              <a:t>読むだけで、どんなものを作れば良いかわかるものが理想的。</a:t>
+            </a:r>
+            <a:endParaRPr lang="en-US" altLang="ja-JP" sz="2400" dirty="0"/>
+          </a:p>
+          <a:p>
+            <a:endParaRPr kumimoji="1" lang="en-US" altLang="ja-JP" sz="2400" dirty="0"/>
+          </a:p>
+          <a:p>
+            <a:r>
+              <a:rPr lang="ja-JP" altLang="en-US" sz="2400" dirty="0"/>
+              <a:t>まずはこれらの資料を作成しましょう。</a:t>
+            </a:r>
+            <a:endParaRPr kumimoji="1" lang="en-US" altLang="ja-JP" sz="2400" dirty="0"/>
+          </a:p>
+        </p:txBody>
+      </p:sp>
+    </p:spTree>
+    <p:extLst>
+      <p:ext uri="{BB962C8B-B14F-4D97-AF65-F5344CB8AC3E}">
+        <p14:creationId xmlns:p14="http://schemas.microsoft.com/office/powerpoint/2010/main" val="327511239"/>
+      </p:ext>
+    </p:extLst>
+  </p:cSld>
+  <p:clrMapOvr>
+    <a:masterClrMapping/>
+  </p:clrMapOvr>
+</p:sld>
+</file>
+
+<file path=ppt/slides/slide3.xml><?xml version="1.0" encoding="utf-8"?>
+<p:sld xmlns:a="http://schemas.openxmlformats.org/drawingml/2006/main" xmlns:r="http://schemas.openxmlformats.org/officeDocument/2006/relationships" xmlns:p="http://schemas.openxmlformats.org/presentationml/2006/main">
+  <p:cSld>
+    <p:spTree>
+      <p:nvGrpSpPr>
+        <p:cNvPr id="1" name=""/>
+        <p:cNvGrpSpPr/>
+        <p:nvPr/>
+      </p:nvGrpSpPr>
+      <p:grpSpPr>
+        <a:xfrm>
+          <a:off x="0" y="0"/>
+          <a:ext cx="0" cy="0"/>
+          <a:chOff x="0" y="0"/>
+          <a:chExt cx="0" cy="0"/>
+        </a:xfrm>
+      </p:grpSpPr>
+      <p:sp>
+        <p:nvSpPr>
+          <p:cNvPr id="4" name="テキスト ボックス 3">
+            <a:extLst>
+              <a:ext uri="{FF2B5EF4-FFF2-40B4-BE49-F238E27FC236}">
+                <a16:creationId xmlns:a16="http://schemas.microsoft.com/office/drawing/2014/main" id="{5A13BF46-B8C5-48AA-8308-C9ECFF431A18}"/>
+              </a:ext>
+            </a:extLst>
+          </p:cNvPr>
+          <p:cNvSpPr txBox="1"/>
+          <p:nvPr/>
+        </p:nvSpPr>
+        <p:spPr>
+          <a:xfrm>
+            <a:off x="567542" y="491954"/>
+            <a:ext cx="7688323" cy="584775"/>
+          </a:xfrm>
+          <a:prstGeom prst="rect">
+            <a:avLst/>
+          </a:prstGeom>
+          <a:noFill/>
+        </p:spPr>
+        <p:txBody>
+          <a:bodyPr wrap="none" rtlCol="0">
+            <a:spAutoFit/>
+          </a:bodyPr>
+          <a:lstStyle/>
+          <a:p>
+            <a:r>
+              <a:rPr kumimoji="1" lang="ja-JP" altLang="en-US" sz="3200" b="1" u="sng" dirty="0"/>
+              <a:t>オリジナルゲーム制作 スケジュール管理</a:t>
+            </a:r>
+          </a:p>
+        </p:txBody>
+      </p:sp>
+      <p:sp>
+        <p:nvSpPr>
+          <p:cNvPr id="6" name="テキスト ボックス 5">
+            <a:extLst>
+              <a:ext uri="{FF2B5EF4-FFF2-40B4-BE49-F238E27FC236}">
+                <a16:creationId xmlns:a16="http://schemas.microsoft.com/office/drawing/2014/main" id="{55830AD6-028B-4C4E-80BF-B70DFC1C3A46}"/>
+              </a:ext>
+            </a:extLst>
+          </p:cNvPr>
+          <p:cNvSpPr txBox="1"/>
+          <p:nvPr/>
+        </p:nvSpPr>
+        <p:spPr>
+          <a:xfrm>
+            <a:off x="567542" y="1216429"/>
+            <a:ext cx="11880175" cy="5262979"/>
+          </a:xfrm>
+          <a:prstGeom prst="rect">
+            <a:avLst/>
+          </a:prstGeom>
+          <a:noFill/>
+        </p:spPr>
+        <p:txBody>
+          <a:bodyPr wrap="none" rtlCol="0">
+            <a:spAutoFit/>
+          </a:bodyPr>
+          <a:lstStyle/>
+          <a:p>
+            <a:r>
+              <a:rPr kumimoji="1" lang="ja-JP" altLang="en-US" sz="2400" dirty="0"/>
+              <a:t>仕様書を書けば、締め切りまでにどのように作業するか、</a:t>
+            </a:r>
+            <a:endParaRPr kumimoji="1" lang="en-US" altLang="ja-JP" sz="2400" dirty="0"/>
+          </a:p>
+          <a:p>
+            <a:r>
+              <a:rPr lang="ja-JP" altLang="en-US" sz="2400" dirty="0"/>
+              <a:t>スケジュールを考えます。</a:t>
+            </a:r>
+            <a:endParaRPr lang="en-US" altLang="ja-JP" sz="2400" dirty="0"/>
+          </a:p>
+          <a:p>
+            <a:endParaRPr kumimoji="1" lang="en-US" altLang="ja-JP" sz="2400" dirty="0"/>
+          </a:p>
+          <a:p>
+            <a:r>
+              <a:rPr lang="ja-JP" altLang="en-US" sz="2400" dirty="0"/>
+              <a:t>仕様書に書かれているもの１つ１つに対して、</a:t>
+            </a:r>
+            <a:r>
+              <a:rPr lang="ja-JP" altLang="en-US" sz="2400" b="1" dirty="0">
+                <a:solidFill>
+                  <a:srgbClr val="FF0000"/>
+                </a:solidFill>
+              </a:rPr>
+              <a:t>どれだけ時間がかかるか（工数）</a:t>
+            </a:r>
+            <a:endParaRPr lang="en-US" altLang="ja-JP" sz="2400" b="1" dirty="0">
+              <a:solidFill>
+                <a:srgbClr val="FF0000"/>
+              </a:solidFill>
+            </a:endParaRPr>
+          </a:p>
+          <a:p>
+            <a:r>
+              <a:rPr kumimoji="1" lang="ja-JP" altLang="en-US" sz="2400" dirty="0"/>
+              <a:t>を予想し、それを守りながら作業を進めます。</a:t>
+            </a:r>
+            <a:endParaRPr kumimoji="1" lang="en-US" altLang="ja-JP" sz="2400" dirty="0"/>
+          </a:p>
+          <a:p>
+            <a:endParaRPr lang="en-US" altLang="ja-JP" sz="2400" dirty="0"/>
+          </a:p>
+          <a:p>
+            <a:r>
+              <a:rPr kumimoji="1" lang="ja-JP" altLang="en-US" sz="2400" b="1" dirty="0">
+                <a:solidFill>
+                  <a:srgbClr val="FF0000"/>
+                </a:solidFill>
+              </a:rPr>
+              <a:t>■注意点</a:t>
+            </a:r>
+            <a:endParaRPr kumimoji="1" lang="en-US" altLang="ja-JP" sz="2400" b="1" dirty="0">
+              <a:solidFill>
+                <a:srgbClr val="FF0000"/>
+              </a:solidFill>
+            </a:endParaRPr>
+          </a:p>
+          <a:p>
+            <a:r>
+              <a:rPr lang="ja-JP" altLang="en-US" sz="2400" b="1" dirty="0">
+                <a:solidFill>
+                  <a:srgbClr val="FF0000"/>
+                </a:solidFill>
+              </a:rPr>
+              <a:t>仕様を全て実装＝完成</a:t>
+            </a:r>
+            <a:r>
+              <a:rPr lang="ja-JP" altLang="en-US" sz="2400" dirty="0"/>
+              <a:t>ではありません。例えば、</a:t>
+            </a:r>
+            <a:endParaRPr lang="en-US" altLang="ja-JP" sz="2400" dirty="0"/>
+          </a:p>
+          <a:p>
+            <a:r>
+              <a:rPr kumimoji="1" lang="ja-JP" altLang="en-US" sz="2400" dirty="0"/>
+              <a:t>・まだ面白くない</a:t>
+            </a:r>
+            <a:endParaRPr kumimoji="1" lang="en-US" altLang="ja-JP" sz="2400" dirty="0"/>
+          </a:p>
+          <a:p>
+            <a:r>
+              <a:rPr lang="ja-JP" altLang="en-US" sz="2400" dirty="0"/>
+              <a:t>・不具合がでてる</a:t>
+            </a:r>
+            <a:endParaRPr lang="en-US" altLang="ja-JP" sz="2400" dirty="0"/>
+          </a:p>
+          <a:p>
+            <a:r>
+              <a:rPr lang="ja-JP" altLang="en-US" sz="2400" dirty="0"/>
+              <a:t>など、作業中に他にやりたいことが常に増えていきます。</a:t>
+            </a:r>
+            <a:endParaRPr lang="en-US" altLang="ja-JP" sz="2400" dirty="0"/>
+          </a:p>
+          <a:p>
+            <a:r>
+              <a:rPr kumimoji="1" lang="ja-JP" altLang="en-US" sz="2400" dirty="0"/>
+              <a:t>それらを想定しながら、</a:t>
+            </a:r>
+            <a:r>
+              <a:rPr kumimoji="1" lang="ja-JP" altLang="en-US" sz="2400" b="1" dirty="0">
+                <a:solidFill>
+                  <a:srgbClr val="FF0000"/>
+                </a:solidFill>
+              </a:rPr>
+              <a:t>余裕（マージン）を持ったスケジュールを考えましょう。</a:t>
+            </a:r>
+            <a:endParaRPr kumimoji="1" lang="en-US" altLang="ja-JP" sz="2400" b="1" dirty="0">
+              <a:solidFill>
+                <a:srgbClr val="FF0000"/>
+              </a:solidFill>
+            </a:endParaRPr>
+          </a:p>
+          <a:p>
+            <a:endParaRPr lang="en-US" altLang="ja-JP" sz="2400" b="1" dirty="0">
+              <a:solidFill>
+                <a:srgbClr val="FF0000"/>
+              </a:solidFill>
+            </a:endParaRPr>
+          </a:p>
+          <a:p>
+            <a:r>
+              <a:rPr kumimoji="1" lang="en-US" altLang="ja-JP" sz="2400" dirty="0"/>
+              <a:t>※</a:t>
+            </a:r>
+            <a:r>
+              <a:rPr kumimoji="1" lang="ja-JP" altLang="en-US" sz="2400" dirty="0"/>
+              <a:t>おおよそですが、締め切りの１か月前に使用の全実装が現実的かと思います。</a:t>
+            </a:r>
+            <a:endParaRPr kumimoji="1" lang="en-US" altLang="ja-JP" sz="2400" dirty="0"/>
+          </a:p>
+        </p:txBody>
+      </p:sp>
+    </p:spTree>
+    <p:extLst>
+      <p:ext uri="{BB962C8B-B14F-4D97-AF65-F5344CB8AC3E}">
+        <p14:creationId xmlns:p14="http://schemas.microsoft.com/office/powerpoint/2010/main" val="519445436"/>
+      </p:ext>
+    </p:extLst>
+  </p:cSld>
+  <p:clrMapOvr>
+    <a:masterClrMapping/>
+  </p:clrMapOvr>
+</p:sld>
+</file>
+
+<file path=ppt/slides/slide4.xml><?xml version="1.0" encoding="utf-8"?>
+<p:sld xmlns:a="http://schemas.openxmlformats.org/drawingml/2006/main" xmlns:r="http://schemas.openxmlformats.org/officeDocument/2006/relationships" xmlns:p="http://schemas.openxmlformats.org/presentationml/2006/main">
+  <p:cSld>
+    <p:spTree>
+      <p:nvGrpSpPr>
+        <p:cNvPr id="1" name=""/>
+        <p:cNvGrpSpPr/>
+        <p:nvPr/>
+      </p:nvGrpSpPr>
+      <p:grpSpPr>
+        <a:xfrm>
+          <a:off x="0" y="0"/>
+          <a:ext cx="0" cy="0"/>
+          <a:chOff x="0" y="0"/>
+          <a:chExt cx="0" cy="0"/>
+        </a:xfrm>
+      </p:grpSpPr>
+      <p:sp>
+        <p:nvSpPr>
+          <p:cNvPr id="4" name="テキスト ボックス 3">
+            <a:extLst>
+              <a:ext uri="{FF2B5EF4-FFF2-40B4-BE49-F238E27FC236}">
+                <a16:creationId xmlns:a16="http://schemas.microsoft.com/office/drawing/2014/main" id="{5A13BF46-B8C5-48AA-8308-C9ECFF431A18}"/>
+              </a:ext>
+            </a:extLst>
+          </p:cNvPr>
+          <p:cNvSpPr txBox="1"/>
+          <p:nvPr/>
+        </p:nvSpPr>
+        <p:spPr>
+          <a:xfrm>
+            <a:off x="567542" y="491954"/>
+            <a:ext cx="7688323" cy="584775"/>
+          </a:xfrm>
+          <a:prstGeom prst="rect">
+            <a:avLst/>
+          </a:prstGeom>
+          <a:noFill/>
+        </p:spPr>
+        <p:txBody>
+          <a:bodyPr wrap="none" rtlCol="0">
+            <a:spAutoFit/>
+          </a:bodyPr>
+          <a:lstStyle/>
+          <a:p>
+            <a:r>
+              <a:rPr kumimoji="1" lang="ja-JP" altLang="en-US" sz="3200" b="1" u="sng" dirty="0"/>
+              <a:t>オリジナルゲーム制作 スケジュール管理</a:t>
+            </a:r>
+          </a:p>
+        </p:txBody>
+      </p:sp>
+      <p:sp>
+        <p:nvSpPr>
+          <p:cNvPr id="6" name="テキスト ボックス 5">
+            <a:extLst>
+              <a:ext uri="{FF2B5EF4-FFF2-40B4-BE49-F238E27FC236}">
+                <a16:creationId xmlns:a16="http://schemas.microsoft.com/office/drawing/2014/main" id="{55830AD6-028B-4C4E-80BF-B70DFC1C3A46}"/>
+              </a:ext>
+            </a:extLst>
+          </p:cNvPr>
+          <p:cNvSpPr txBox="1"/>
+          <p:nvPr/>
+        </p:nvSpPr>
+        <p:spPr>
+          <a:xfrm>
+            <a:off x="567542" y="1216429"/>
+            <a:ext cx="9725739" cy="4154984"/>
+          </a:xfrm>
+          <a:prstGeom prst="rect">
+            <a:avLst/>
+          </a:prstGeom>
+          <a:noFill/>
+        </p:spPr>
+        <p:txBody>
+          <a:bodyPr wrap="none" rtlCol="0">
+            <a:spAutoFit/>
+          </a:bodyPr>
+          <a:lstStyle/>
+          <a:p>
+            <a:r>
+              <a:rPr kumimoji="1" lang="ja-JP" altLang="en-US" sz="2400" dirty="0"/>
+              <a:t>スケジュールを決めたら、よほどのことがない限り守りましょう。</a:t>
+            </a:r>
+            <a:endParaRPr kumimoji="1" lang="en-US" altLang="ja-JP" sz="2400" dirty="0"/>
+          </a:p>
+          <a:p>
+            <a:r>
+              <a:rPr lang="ja-JP" altLang="en-US" sz="2400" dirty="0"/>
+              <a:t>授業の時間で間に合わなければ、放課後やお家で作業しましょう。</a:t>
+            </a:r>
+            <a:endParaRPr lang="en-US" altLang="ja-JP" sz="2400" dirty="0"/>
+          </a:p>
+          <a:p>
+            <a:r>
+              <a:rPr lang="ja-JP" altLang="en-US" sz="2400" b="1" dirty="0">
+                <a:solidFill>
+                  <a:srgbClr val="FF0000"/>
+                </a:solidFill>
+              </a:rPr>
+              <a:t>よほどのことが発生した場合は、</a:t>
+            </a:r>
+            <a:endParaRPr lang="en-US" altLang="ja-JP" sz="2400" b="1" dirty="0">
+              <a:solidFill>
+                <a:srgbClr val="FF0000"/>
+              </a:solidFill>
+            </a:endParaRPr>
+          </a:p>
+          <a:p>
+            <a:r>
+              <a:rPr lang="ja-JP" altLang="en-US" sz="2400" b="1" dirty="0">
+                <a:solidFill>
+                  <a:srgbClr val="FF0000"/>
+                </a:solidFill>
+              </a:rPr>
+              <a:t>スケジュールを組みなおしましょう。（リスケジュール）</a:t>
+            </a:r>
+            <a:endParaRPr lang="en-US" altLang="ja-JP" sz="2400" b="1" dirty="0">
+              <a:solidFill>
+                <a:srgbClr val="FF0000"/>
+              </a:solidFill>
+            </a:endParaRPr>
+          </a:p>
+          <a:p>
+            <a:endParaRPr kumimoji="1" lang="en-US" altLang="ja-JP" sz="2400" dirty="0"/>
+          </a:p>
+          <a:p>
+            <a:r>
+              <a:rPr lang="ja-JP" altLang="en-US" sz="2400" b="1" dirty="0">
+                <a:solidFill>
+                  <a:srgbClr val="FF0000"/>
+                </a:solidFill>
+              </a:rPr>
+              <a:t>■よほどのこととは</a:t>
+            </a:r>
+            <a:endParaRPr lang="en-US" altLang="ja-JP" sz="2400" b="1" dirty="0">
+              <a:solidFill>
+                <a:srgbClr val="FF0000"/>
+              </a:solidFill>
+            </a:endParaRPr>
+          </a:p>
+          <a:p>
+            <a:r>
+              <a:rPr kumimoji="1" lang="ja-JP" altLang="en-US" sz="2400" dirty="0"/>
+              <a:t>・想定していたものよりずっと大規模だった</a:t>
+            </a:r>
+            <a:endParaRPr kumimoji="1" lang="en-US" altLang="ja-JP" sz="2400" dirty="0"/>
+          </a:p>
+          <a:p>
+            <a:r>
+              <a:rPr lang="ja-JP" altLang="en-US" sz="2400" dirty="0"/>
+              <a:t>・不具合が出すぎて収集がつかなくなった</a:t>
+            </a:r>
+            <a:endParaRPr lang="en-US" altLang="ja-JP" sz="2400" dirty="0"/>
+          </a:p>
+          <a:p>
+            <a:r>
+              <a:rPr kumimoji="1" lang="ja-JP" altLang="en-US" sz="2400" dirty="0"/>
+              <a:t>・想定していたものよりも難易度が高すぎた</a:t>
+            </a:r>
+            <a:endParaRPr kumimoji="1" lang="en-US" altLang="ja-JP" sz="2400" dirty="0"/>
+          </a:p>
+          <a:p>
+            <a:endParaRPr lang="en-US" altLang="ja-JP" sz="2400" dirty="0"/>
+          </a:p>
+          <a:p>
+            <a:r>
+              <a:rPr kumimoji="1" lang="ja-JP" altLang="en-US" sz="2400" dirty="0"/>
+              <a:t>判断がつきにくいと思いますので、こまめに先生に相談しましょう。</a:t>
+            </a:r>
+            <a:endParaRPr kumimoji="1" lang="en-US" altLang="ja-JP" sz="2400" dirty="0"/>
+          </a:p>
+        </p:txBody>
+      </p:sp>
+    </p:spTree>
+    <p:extLst>
+      <p:ext uri="{BB962C8B-B14F-4D97-AF65-F5344CB8AC3E}">
+        <p14:creationId xmlns:p14="http://schemas.microsoft.com/office/powerpoint/2010/main" val="2278967229"/>
+      </p:ext>
+    </p:extLst>
+  </p:cSld>
+  <p:clrMapOvr>
+    <a:masterClrMapping/>
+  </p:clrMapOvr>
+</p:sld>
+</file>
+
+<file path=ppt/slides/slide5.xml><?xml version="1.0" encoding="utf-8"?>
+<p:sld xmlns:a="http://schemas.openxmlformats.org/drawingml/2006/main" xmlns:r="http://schemas.openxmlformats.org/officeDocument/2006/relationships" xmlns:p="http://schemas.openxmlformats.org/presentationml/2006/main">
+  <p:cSld>
+    <p:spTree>
+      <p:nvGrpSpPr>
+        <p:cNvPr id="1" name=""/>
+        <p:cNvGrpSpPr/>
+        <p:nvPr/>
+      </p:nvGrpSpPr>
+      <p:grpSpPr>
+        <a:xfrm>
+          <a:off x="0" y="0"/>
+          <a:ext cx="0" cy="0"/>
+          <a:chOff x="0" y="0"/>
+          <a:chExt cx="0" cy="0"/>
+        </a:xfrm>
+      </p:grpSpPr>
+      <p:sp>
+        <p:nvSpPr>
+          <p:cNvPr id="4" name="テキスト ボックス 3">
+            <a:extLst>
+              <a:ext uri="{FF2B5EF4-FFF2-40B4-BE49-F238E27FC236}">
+                <a16:creationId xmlns:a16="http://schemas.microsoft.com/office/drawing/2014/main" id="{5A13BF46-B8C5-48AA-8308-C9ECFF431A18}"/>
+              </a:ext>
+            </a:extLst>
+          </p:cNvPr>
+          <p:cNvSpPr txBox="1"/>
+          <p:nvPr/>
+        </p:nvSpPr>
+        <p:spPr>
+          <a:xfrm>
+            <a:off x="567542" y="491954"/>
+            <a:ext cx="7688323" cy="584775"/>
+          </a:xfrm>
+          <a:prstGeom prst="rect">
+            <a:avLst/>
+          </a:prstGeom>
+          <a:noFill/>
+        </p:spPr>
+        <p:txBody>
+          <a:bodyPr wrap="none" rtlCol="0">
+            <a:spAutoFit/>
+          </a:bodyPr>
+          <a:lstStyle/>
+          <a:p>
+            <a:r>
+              <a:rPr kumimoji="1" lang="ja-JP" altLang="en-US" sz="3200" b="1" u="sng" dirty="0"/>
+              <a:t>オリジナルゲーム制作 スケジュール管理</a:t>
+            </a:r>
+          </a:p>
+        </p:txBody>
+      </p:sp>
+      <p:sp>
+        <p:nvSpPr>
+          <p:cNvPr id="6" name="テキスト ボックス 5">
+            <a:extLst>
+              <a:ext uri="{FF2B5EF4-FFF2-40B4-BE49-F238E27FC236}">
+                <a16:creationId xmlns:a16="http://schemas.microsoft.com/office/drawing/2014/main" id="{55830AD6-028B-4C4E-80BF-B70DFC1C3A46}"/>
+              </a:ext>
+            </a:extLst>
+          </p:cNvPr>
+          <p:cNvSpPr txBox="1"/>
+          <p:nvPr/>
+        </p:nvSpPr>
+        <p:spPr>
+          <a:xfrm>
+            <a:off x="567542" y="1216429"/>
+            <a:ext cx="6340197" cy="461665"/>
+          </a:xfrm>
+          <a:prstGeom prst="rect">
+            <a:avLst/>
+          </a:prstGeom>
+          <a:noFill/>
+        </p:spPr>
+        <p:txBody>
+          <a:bodyPr wrap="none" rtlCol="0">
+            <a:spAutoFit/>
+          </a:bodyPr>
+          <a:lstStyle/>
+          <a:p>
+            <a:r>
+              <a:rPr kumimoji="1" lang="ja-JP" altLang="en-US" sz="2400" dirty="0"/>
+              <a:t>これらを踏まえたうえでの作業の流れです。</a:t>
+            </a:r>
+            <a:endParaRPr kumimoji="1" lang="en-US" altLang="ja-JP" sz="2400" dirty="0"/>
+          </a:p>
+        </p:txBody>
+      </p:sp>
+      <p:sp>
+        <p:nvSpPr>
+          <p:cNvPr id="2" name="正方形/長方形 1">
+            <a:extLst>
+              <a:ext uri="{FF2B5EF4-FFF2-40B4-BE49-F238E27FC236}">
+                <a16:creationId xmlns:a16="http://schemas.microsoft.com/office/drawing/2014/main" id="{1C27C03E-0B0A-439C-9B96-BAC9BEF89C89}"/>
+              </a:ext>
+            </a:extLst>
+          </p:cNvPr>
+          <p:cNvSpPr/>
+          <p:nvPr/>
+        </p:nvSpPr>
+        <p:spPr>
+          <a:xfrm>
+            <a:off x="767370" y="2836506"/>
+            <a:ext cx="650883" cy="1970175"/>
+          </a:xfrm>
+          <a:prstGeom prst="rect">
+            <a:avLst/>
+          </a:prstGeom>
+        </p:spPr>
+        <p:style>
+          <a:lnRef idx="2">
+            <a:schemeClr val="accent1">
+              <a:shade val="50000"/>
+            </a:schemeClr>
+          </a:lnRef>
+          <a:fillRef idx="1">
+            <a:schemeClr val="accent1"/>
+          </a:fillRef>
+          <a:effectRef idx="0">
+            <a:schemeClr val="accent1"/>
+          </a:effectRef>
+          <a:fontRef idx="minor">
+            <a:schemeClr val="lt1"/>
+          </a:fontRef>
+        </p:style>
+        <p:txBody>
+          <a:bodyPr vert="eaVert" rtlCol="0" anchor="ctr">
+            <a:normAutofit/>
+          </a:bodyPr>
+          <a:lstStyle/>
+          <a:p>
+            <a:pPr algn="ctr"/>
+            <a:r>
+              <a:rPr kumimoji="1" lang="ja-JP" altLang="en-US" b="1" dirty="0"/>
+              <a:t>企画書作成</a:t>
+            </a:r>
+          </a:p>
+        </p:txBody>
+      </p:sp>
+      <p:sp>
+        <p:nvSpPr>
+          <p:cNvPr id="5" name="正方形/長方形 4">
+            <a:extLst>
+              <a:ext uri="{FF2B5EF4-FFF2-40B4-BE49-F238E27FC236}">
+                <a16:creationId xmlns:a16="http://schemas.microsoft.com/office/drawing/2014/main" id="{61B73BD5-A1FE-4B26-BA98-6AB06CA546AC}"/>
+              </a:ext>
+            </a:extLst>
+          </p:cNvPr>
+          <p:cNvSpPr/>
+          <p:nvPr/>
+        </p:nvSpPr>
+        <p:spPr>
+          <a:xfrm>
+            <a:off x="3282673" y="2836506"/>
+            <a:ext cx="650883" cy="1970175"/>
+          </a:xfrm>
+          <a:prstGeom prst="rect">
+            <a:avLst/>
+          </a:prstGeom>
+        </p:spPr>
+        <p:style>
+          <a:lnRef idx="2">
+            <a:schemeClr val="accent1">
+              <a:shade val="50000"/>
+            </a:schemeClr>
+          </a:lnRef>
+          <a:fillRef idx="1">
+            <a:schemeClr val="accent1"/>
+          </a:fillRef>
+          <a:effectRef idx="0">
+            <a:schemeClr val="accent1"/>
+          </a:effectRef>
+          <a:fontRef idx="minor">
+            <a:schemeClr val="lt1"/>
+          </a:fontRef>
+        </p:style>
+        <p:txBody>
+          <a:bodyPr vert="eaVert" rtlCol="0" anchor="ctr">
+            <a:normAutofit/>
+          </a:bodyPr>
+          <a:lstStyle/>
+          <a:p>
+            <a:pPr algn="ctr"/>
+            <a:r>
+              <a:rPr kumimoji="1" lang="ja-JP" altLang="en-US" b="1" dirty="0"/>
+              <a:t>仕様書作成</a:t>
+            </a:r>
+          </a:p>
+        </p:txBody>
+      </p:sp>
+      <p:sp>
+        <p:nvSpPr>
+          <p:cNvPr id="7" name="正方形/長方形 6">
+            <a:extLst>
+              <a:ext uri="{FF2B5EF4-FFF2-40B4-BE49-F238E27FC236}">
+                <a16:creationId xmlns:a16="http://schemas.microsoft.com/office/drawing/2014/main" id="{DCD7446E-811B-4FE2-86CD-98546BC2E9B4}"/>
+              </a:ext>
+            </a:extLst>
+          </p:cNvPr>
+          <p:cNvSpPr/>
+          <p:nvPr/>
+        </p:nvSpPr>
+        <p:spPr>
+          <a:xfrm>
+            <a:off x="5814934" y="2836506"/>
+            <a:ext cx="650883" cy="1970175"/>
+          </a:xfrm>
+          <a:prstGeom prst="rect">
+            <a:avLst/>
+          </a:prstGeom>
+        </p:spPr>
+        <p:style>
+          <a:lnRef idx="2">
+            <a:schemeClr val="accent1">
+              <a:shade val="50000"/>
+            </a:schemeClr>
+          </a:lnRef>
+          <a:fillRef idx="1">
+            <a:schemeClr val="accent1"/>
+          </a:fillRef>
+          <a:effectRef idx="0">
+            <a:schemeClr val="accent1"/>
+          </a:effectRef>
+          <a:fontRef idx="minor">
+            <a:schemeClr val="lt1"/>
+          </a:fontRef>
+        </p:style>
+        <p:txBody>
+          <a:bodyPr vert="eaVert" rtlCol="0" anchor="ctr">
+            <a:normAutofit/>
+          </a:bodyPr>
+          <a:lstStyle/>
+          <a:p>
+            <a:pPr algn="ctr"/>
+            <a:r>
+              <a:rPr kumimoji="1" lang="ja-JP" altLang="en-US" b="1" dirty="0"/>
+              <a:t>スケジュール作成</a:t>
+            </a:r>
+          </a:p>
+        </p:txBody>
+      </p:sp>
+      <p:sp>
+        <p:nvSpPr>
+          <p:cNvPr id="8" name="正方形/長方形 7">
+            <a:extLst>
+              <a:ext uri="{FF2B5EF4-FFF2-40B4-BE49-F238E27FC236}">
+                <a16:creationId xmlns:a16="http://schemas.microsoft.com/office/drawing/2014/main" id="{059A2CB7-A53D-4218-A99D-AE7957FBE5F1}"/>
+              </a:ext>
+            </a:extLst>
+          </p:cNvPr>
+          <p:cNvSpPr/>
+          <p:nvPr/>
+        </p:nvSpPr>
+        <p:spPr>
+          <a:xfrm>
+            <a:off x="8313279" y="2836505"/>
+            <a:ext cx="650883" cy="1970175"/>
+          </a:xfrm>
+          <a:prstGeom prst="rect">
+            <a:avLst/>
+          </a:prstGeom>
+        </p:spPr>
+        <p:style>
+          <a:lnRef idx="2">
+            <a:schemeClr val="accent1">
+              <a:shade val="50000"/>
+            </a:schemeClr>
+          </a:lnRef>
+          <a:fillRef idx="1">
+            <a:schemeClr val="accent1"/>
+          </a:fillRef>
+          <a:effectRef idx="0">
+            <a:schemeClr val="accent1"/>
+          </a:effectRef>
+          <a:fontRef idx="minor">
+            <a:schemeClr val="lt1"/>
+          </a:fontRef>
+        </p:style>
+        <p:txBody>
+          <a:bodyPr vert="eaVert" rtlCol="0" anchor="ctr">
+            <a:normAutofit/>
+          </a:bodyPr>
+          <a:lstStyle/>
+          <a:p>
+            <a:pPr algn="ctr"/>
+            <a:r>
+              <a:rPr kumimoji="1" lang="ja-JP" altLang="en-US" b="1" dirty="0"/>
+              <a:t>制作作業</a:t>
+            </a:r>
+          </a:p>
+        </p:txBody>
+      </p:sp>
+      <p:sp>
+        <p:nvSpPr>
+          <p:cNvPr id="3" name="矢印: 右 2">
+            <a:extLst>
+              <a:ext uri="{FF2B5EF4-FFF2-40B4-BE49-F238E27FC236}">
+                <a16:creationId xmlns:a16="http://schemas.microsoft.com/office/drawing/2014/main" id="{BDE673A4-72AE-4E79-93D1-B47EC5DA5163}"/>
+              </a:ext>
+            </a:extLst>
+          </p:cNvPr>
+          <p:cNvSpPr/>
+          <p:nvPr/>
+        </p:nvSpPr>
+        <p:spPr>
+          <a:xfrm>
+            <a:off x="1418253" y="3524429"/>
+            <a:ext cx="1847462" cy="711958"/>
+          </a:xfrm>
+          <a:prstGeom prst="rightArrow">
+            <a:avLst/>
+          </a:prstGeom>
+        </p:spPr>
+        <p:style>
+          <a:lnRef idx="2">
+            <a:schemeClr val="accent2">
+              <a:shade val="50000"/>
+            </a:schemeClr>
+          </a:lnRef>
+          <a:fillRef idx="1">
+            <a:schemeClr val="accent2"/>
+          </a:fillRef>
+          <a:effectRef idx="0">
+            <a:schemeClr val="accent2"/>
+          </a:effectRef>
+          <a:fontRef idx="minor">
+            <a:schemeClr val="lt1"/>
+          </a:fontRef>
+        </p:style>
+        <p:txBody>
+          <a:bodyPr rtlCol="0" anchor="ctr"/>
+          <a:lstStyle/>
+          <a:p>
+            <a:pPr algn="ctr"/>
+            <a:r>
+              <a:rPr kumimoji="1" lang="ja-JP" altLang="en-US" b="1" dirty="0"/>
+              <a:t>チェック合格</a:t>
+            </a:r>
+          </a:p>
+        </p:txBody>
+      </p:sp>
+      <p:sp>
+        <p:nvSpPr>
+          <p:cNvPr id="9" name="矢印: 右 8">
+            <a:extLst>
+              <a:ext uri="{FF2B5EF4-FFF2-40B4-BE49-F238E27FC236}">
+                <a16:creationId xmlns:a16="http://schemas.microsoft.com/office/drawing/2014/main" id="{4513EE6E-6355-4232-A1D1-C57928301B85}"/>
+              </a:ext>
+            </a:extLst>
+          </p:cNvPr>
+          <p:cNvSpPr/>
+          <p:nvPr/>
+        </p:nvSpPr>
+        <p:spPr>
+          <a:xfrm>
+            <a:off x="3950514" y="3524429"/>
+            <a:ext cx="1847462" cy="711958"/>
+          </a:xfrm>
+          <a:prstGeom prst="rightArrow">
+            <a:avLst/>
+          </a:prstGeom>
+        </p:spPr>
+        <p:style>
+          <a:lnRef idx="2">
+            <a:schemeClr val="accent2">
+              <a:shade val="50000"/>
+            </a:schemeClr>
+          </a:lnRef>
+          <a:fillRef idx="1">
+            <a:schemeClr val="accent2"/>
+          </a:fillRef>
+          <a:effectRef idx="0">
+            <a:schemeClr val="accent2"/>
+          </a:effectRef>
+          <a:fontRef idx="minor">
+            <a:schemeClr val="lt1"/>
+          </a:fontRef>
+        </p:style>
+        <p:txBody>
+          <a:bodyPr rtlCol="0" anchor="ctr"/>
+          <a:lstStyle/>
+          <a:p>
+            <a:pPr algn="ctr"/>
+            <a:r>
+              <a:rPr kumimoji="1" lang="ja-JP" altLang="en-US" b="1" dirty="0"/>
+              <a:t>チェック合格</a:t>
+            </a:r>
+          </a:p>
+        </p:txBody>
+      </p:sp>
+      <p:sp>
+        <p:nvSpPr>
+          <p:cNvPr id="10" name="矢印: 右 9">
+            <a:extLst>
+              <a:ext uri="{FF2B5EF4-FFF2-40B4-BE49-F238E27FC236}">
+                <a16:creationId xmlns:a16="http://schemas.microsoft.com/office/drawing/2014/main" id="{D7871462-ED25-484E-9651-0561BDE55F35}"/>
+              </a:ext>
+            </a:extLst>
+          </p:cNvPr>
+          <p:cNvSpPr/>
+          <p:nvPr/>
+        </p:nvSpPr>
+        <p:spPr>
+          <a:xfrm>
+            <a:off x="6465817" y="3524429"/>
+            <a:ext cx="1847462" cy="711958"/>
+          </a:xfrm>
+          <a:prstGeom prst="rightArrow">
+            <a:avLst/>
+          </a:prstGeom>
+        </p:spPr>
+        <p:style>
+          <a:lnRef idx="2">
+            <a:schemeClr val="accent2">
+              <a:shade val="50000"/>
+            </a:schemeClr>
+          </a:lnRef>
+          <a:fillRef idx="1">
+            <a:schemeClr val="accent2"/>
+          </a:fillRef>
+          <a:effectRef idx="0">
+            <a:schemeClr val="accent2"/>
+          </a:effectRef>
+          <a:fontRef idx="minor">
+            <a:schemeClr val="lt1"/>
+          </a:fontRef>
+        </p:style>
+        <p:txBody>
+          <a:bodyPr rtlCol="0" anchor="ctr"/>
+          <a:lstStyle/>
+          <a:p>
+            <a:pPr algn="ctr"/>
+            <a:r>
+              <a:rPr kumimoji="1" lang="ja-JP" altLang="en-US" b="1" dirty="0"/>
+              <a:t>チェック合格</a:t>
+            </a:r>
+          </a:p>
+        </p:txBody>
+      </p:sp>
+      <p:sp>
+        <p:nvSpPr>
+          <p:cNvPr id="11" name="矢印: 右 10">
+            <a:extLst>
+              <a:ext uri="{FF2B5EF4-FFF2-40B4-BE49-F238E27FC236}">
+                <a16:creationId xmlns:a16="http://schemas.microsoft.com/office/drawing/2014/main" id="{965B5186-7708-4743-9E08-C7ABBEF63CAD}"/>
+              </a:ext>
+            </a:extLst>
+          </p:cNvPr>
+          <p:cNvSpPr/>
+          <p:nvPr/>
+        </p:nvSpPr>
+        <p:spPr>
+          <a:xfrm>
+            <a:off x="8964162" y="2836505"/>
+            <a:ext cx="1847462" cy="711958"/>
+          </a:xfrm>
+          <a:prstGeom prst="rightArrow">
+            <a:avLst/>
+          </a:prstGeom>
+        </p:spPr>
+        <p:style>
+          <a:lnRef idx="2">
+            <a:schemeClr val="accent2">
+              <a:shade val="50000"/>
+            </a:schemeClr>
+          </a:lnRef>
+          <a:fillRef idx="1">
+            <a:schemeClr val="accent2"/>
+          </a:fillRef>
+          <a:effectRef idx="0">
+            <a:schemeClr val="accent2"/>
+          </a:effectRef>
+          <a:fontRef idx="minor">
+            <a:schemeClr val="lt1"/>
+          </a:fontRef>
+        </p:style>
+        <p:txBody>
+          <a:bodyPr rtlCol="0" anchor="ctr"/>
+          <a:lstStyle/>
+          <a:p>
+            <a:pPr algn="ctr"/>
+            <a:r>
+              <a:rPr kumimoji="1" lang="ja-JP" altLang="en-US" sz="1400" b="1" dirty="0"/>
+              <a:t>よほどのこと発生</a:t>
+            </a:r>
+          </a:p>
+        </p:txBody>
+      </p:sp>
+      <p:sp>
+        <p:nvSpPr>
+          <p:cNvPr id="12" name="正方形/長方形 11">
+            <a:extLst>
+              <a:ext uri="{FF2B5EF4-FFF2-40B4-BE49-F238E27FC236}">
+                <a16:creationId xmlns:a16="http://schemas.microsoft.com/office/drawing/2014/main" id="{788C6015-DD53-4870-9C6F-C73CE6F3FCDE}"/>
+              </a:ext>
+            </a:extLst>
+          </p:cNvPr>
+          <p:cNvSpPr/>
+          <p:nvPr/>
+        </p:nvSpPr>
+        <p:spPr>
+          <a:xfrm>
+            <a:off x="10828582" y="2836504"/>
+            <a:ext cx="650883" cy="1970175"/>
+          </a:xfrm>
+          <a:prstGeom prst="rect">
+            <a:avLst/>
+          </a:prstGeom>
+        </p:spPr>
+        <p:style>
+          <a:lnRef idx="2">
+            <a:schemeClr val="accent1">
+              <a:shade val="50000"/>
+            </a:schemeClr>
+          </a:lnRef>
+          <a:fillRef idx="1">
+            <a:schemeClr val="accent1"/>
+          </a:fillRef>
+          <a:effectRef idx="0">
+            <a:schemeClr val="accent1"/>
+          </a:effectRef>
+          <a:fontRef idx="minor">
+            <a:schemeClr val="lt1"/>
+          </a:fontRef>
+        </p:style>
+        <p:txBody>
+          <a:bodyPr vert="eaVert" rtlCol="0" anchor="ctr">
+            <a:normAutofit/>
+          </a:bodyPr>
+          <a:lstStyle/>
+          <a:p>
+            <a:pPr algn="ctr"/>
+            <a:r>
+              <a:rPr kumimoji="1" lang="ja-JP" altLang="en-US" b="1" dirty="0"/>
+              <a:t>リスケジュール</a:t>
+            </a:r>
+          </a:p>
+        </p:txBody>
+      </p:sp>
+      <p:sp>
+        <p:nvSpPr>
+          <p:cNvPr id="13" name="矢印: 左 12">
+            <a:extLst>
+              <a:ext uri="{FF2B5EF4-FFF2-40B4-BE49-F238E27FC236}">
+                <a16:creationId xmlns:a16="http://schemas.microsoft.com/office/drawing/2014/main" id="{7083C5D0-BD82-45BB-9AE9-10839F814524}"/>
+              </a:ext>
+            </a:extLst>
+          </p:cNvPr>
+          <p:cNvSpPr/>
+          <p:nvPr/>
+        </p:nvSpPr>
+        <p:spPr>
+          <a:xfrm>
+            <a:off x="8981120" y="4004248"/>
+            <a:ext cx="1847462" cy="637732"/>
+          </a:xfrm>
+          <a:prstGeom prst="leftArrow">
+            <a:avLst/>
+          </a:prstGeom>
+        </p:spPr>
+        <p:style>
+          <a:lnRef idx="2">
+            <a:schemeClr val="accent2">
+              <a:shade val="50000"/>
+            </a:schemeClr>
+          </a:lnRef>
+          <a:fillRef idx="1">
+            <a:schemeClr val="accent2"/>
+          </a:fillRef>
+          <a:effectRef idx="0">
+            <a:schemeClr val="accent2"/>
+          </a:effectRef>
+          <a:fontRef idx="minor">
+            <a:schemeClr val="lt1"/>
+          </a:fontRef>
+        </p:style>
+        <p:txBody>
+          <a:bodyPr rtlCol="0" anchor="ctr"/>
+          <a:lstStyle/>
+          <a:p>
+            <a:pPr algn="ctr"/>
+            <a:r>
+              <a:rPr kumimoji="1" lang="ja-JP" altLang="en-US" b="1" dirty="0"/>
+              <a:t>チェック合格</a:t>
+            </a:r>
+          </a:p>
+        </p:txBody>
+      </p:sp>
+    </p:spTree>
+    <p:extLst>
+      <p:ext uri="{BB962C8B-B14F-4D97-AF65-F5344CB8AC3E}">
+        <p14:creationId xmlns:p14="http://schemas.microsoft.com/office/powerpoint/2010/main" val="1611807896"/>
+      </p:ext>
+    </p:extLst>
+  </p:cSld>
+  <p:clrMapOvr>
+    <a:masterClrMapping/>
+  </p:clrMapOvr>
+</p:sld>
+</file>
+
 <file path=ppt/theme/theme1.xml><?xml version="1.0" encoding="utf-8"?>
 <a:theme xmlns:a="http://schemas.openxmlformats.org/drawingml/2006/main" name="Office テーマ">
   <a:themeElements>

--- a/ゲーム科1年/00_前期/ゲームプログラミングⅢ/04_オリジナルゲーム制作.pptx
+++ b/ゲーム科1年/00_前期/ゲームプログラミングⅢ/04_オリジナルゲーム制作.pptx
@@ -263,7 +263,7 @@
           <a:p>
             <a:fld id="{E9CC885B-4903-4D54-9A93-00025F12DED9}" type="datetimeFigureOut">
               <a:rPr kumimoji="1" lang="ja-JP" altLang="en-US" smtClean="0"/>
-              <a:t>2026/1/28</a:t>
+              <a:t>2026/1/29</a:t>
             </a:fld>
             <a:endParaRPr kumimoji="1" lang="ja-JP" altLang="en-US"/>
           </a:p>
@@ -493,7 +493,7 @@
           <a:p>
             <a:fld id="{E9CC885B-4903-4D54-9A93-00025F12DED9}" type="datetimeFigureOut">
               <a:rPr kumimoji="1" lang="ja-JP" altLang="en-US" smtClean="0"/>
-              <a:t>2026/1/28</a:t>
+              <a:t>2026/1/29</a:t>
             </a:fld>
             <a:endParaRPr kumimoji="1" lang="ja-JP" altLang="en-US"/>
           </a:p>
@@ -733,7 +733,7 @@
           <a:p>
             <a:fld id="{E9CC885B-4903-4D54-9A93-00025F12DED9}" type="datetimeFigureOut">
               <a:rPr kumimoji="1" lang="ja-JP" altLang="en-US" smtClean="0"/>
-              <a:t>2026/1/28</a:t>
+              <a:t>2026/1/29</a:t>
             </a:fld>
             <a:endParaRPr kumimoji="1" lang="ja-JP" altLang="en-US"/>
           </a:p>
@@ -963,7 +963,7 @@
           <a:p>
             <a:fld id="{E9CC885B-4903-4D54-9A93-00025F12DED9}" type="datetimeFigureOut">
               <a:rPr kumimoji="1" lang="ja-JP" altLang="en-US" smtClean="0"/>
-              <a:t>2026/1/28</a:t>
+              <a:t>2026/1/29</a:t>
             </a:fld>
             <a:endParaRPr kumimoji="1" lang="ja-JP" altLang="en-US"/>
           </a:p>
@@ -1238,7 +1238,7 @@
           <a:p>
             <a:fld id="{E9CC885B-4903-4D54-9A93-00025F12DED9}" type="datetimeFigureOut">
               <a:rPr kumimoji="1" lang="ja-JP" altLang="en-US" smtClean="0"/>
-              <a:t>2026/1/28</a:t>
+              <a:t>2026/1/29</a:t>
             </a:fld>
             <a:endParaRPr kumimoji="1" lang="ja-JP" altLang="en-US"/>
           </a:p>
@@ -1567,7 +1567,7 @@
           <a:p>
             <a:fld id="{E9CC885B-4903-4D54-9A93-00025F12DED9}" type="datetimeFigureOut">
               <a:rPr kumimoji="1" lang="ja-JP" altLang="en-US" smtClean="0"/>
-              <a:t>2026/1/28</a:t>
+              <a:t>2026/1/29</a:t>
             </a:fld>
             <a:endParaRPr kumimoji="1" lang="ja-JP" altLang="en-US"/>
           </a:p>
@@ -2043,7 +2043,7 @@
           <a:p>
             <a:fld id="{E9CC885B-4903-4D54-9A93-00025F12DED9}" type="datetimeFigureOut">
               <a:rPr kumimoji="1" lang="ja-JP" altLang="en-US" smtClean="0"/>
-              <a:t>2026/1/28</a:t>
+              <a:t>2026/1/29</a:t>
             </a:fld>
             <a:endParaRPr kumimoji="1" lang="ja-JP" altLang="en-US"/>
           </a:p>
@@ -2184,7 +2184,7 @@
           <a:p>
             <a:fld id="{E9CC885B-4903-4D54-9A93-00025F12DED9}" type="datetimeFigureOut">
               <a:rPr kumimoji="1" lang="ja-JP" altLang="en-US" smtClean="0"/>
-              <a:t>2026/1/28</a:t>
+              <a:t>2026/1/29</a:t>
             </a:fld>
             <a:endParaRPr kumimoji="1" lang="ja-JP" altLang="en-US"/>
           </a:p>
@@ -2297,7 +2297,7 @@
           <a:p>
             <a:fld id="{E9CC885B-4903-4D54-9A93-00025F12DED9}" type="datetimeFigureOut">
               <a:rPr kumimoji="1" lang="ja-JP" altLang="en-US" smtClean="0"/>
-              <a:t>2026/1/28</a:t>
+              <a:t>2026/1/29</a:t>
             </a:fld>
             <a:endParaRPr kumimoji="1" lang="ja-JP" altLang="en-US"/>
           </a:p>
@@ -2640,7 +2640,7 @@
           <a:p>
             <a:fld id="{E9CC885B-4903-4D54-9A93-00025F12DED9}" type="datetimeFigureOut">
               <a:rPr kumimoji="1" lang="ja-JP" altLang="en-US" smtClean="0"/>
-              <a:t>2026/1/28</a:t>
+              <a:t>2026/1/29</a:t>
             </a:fld>
             <a:endParaRPr kumimoji="1" lang="ja-JP" altLang="en-US"/>
           </a:p>
@@ -2928,7 +2928,7 @@
           <a:p>
             <a:fld id="{E9CC885B-4903-4D54-9A93-00025F12DED9}" type="datetimeFigureOut">
               <a:rPr kumimoji="1" lang="ja-JP" altLang="en-US" smtClean="0"/>
-              <a:t>2026/1/28</a:t>
+              <a:t>2026/1/29</a:t>
             </a:fld>
             <a:endParaRPr kumimoji="1" lang="ja-JP" altLang="en-US"/>
           </a:p>
@@ -3201,7 +3201,7 @@
           <a:p>
             <a:fld id="{E9CC885B-4903-4D54-9A93-00025F12DED9}" type="datetimeFigureOut">
               <a:rPr kumimoji="1" lang="ja-JP" altLang="en-US" smtClean="0"/>
-              <a:t>2026/1/28</a:t>
+              <a:t>2026/1/29</a:t>
             </a:fld>
             <a:endParaRPr kumimoji="1" lang="ja-JP" altLang="en-US"/>
           </a:p>
@@ -4404,7 +4404,7 @@
           <a:p>
             <a:r>
               <a:rPr kumimoji="1" lang="ja-JP" altLang="en-US" sz="2400" dirty="0"/>
-              <a:t>・想定していたものよりも難易度が高すぎた</a:t>
+              <a:t>・想定していたものよりも実装難易度が高すぎた</a:t>
             </a:r>
             <a:endParaRPr kumimoji="1" lang="en-US" altLang="ja-JP" sz="2400" dirty="0"/>
           </a:p>
